--- a/prompt_engineering/pe-X_examples_contentCreation_coding_summarization_QA_dataExtraction.pptx
+++ b/prompt_engineering/pe-X_examples_contentCreation_coding_summarization_QA_dataExtraction.pptx
@@ -247,7 +247,7 @@
           <a:p>
             <a:fld id="{7BAEECA8-D063-486F-AE31-5020270C1449}" type="datetimeFigureOut">
               <a:rPr lang="en-US" smtClean="0"/>
-              <a:t>6/17/2026</a:t>
+              <a:t>7/6/2026</a:t>
             </a:fld>
             <a:endParaRPr lang="en-US"/>
           </a:p>
@@ -489,7 +489,7 @@
           <a:p>
             <a:fld id="{6383FAE1-13DE-4511-8C1B-C8AFB720664C}" type="datetimeFigureOut">
               <a:rPr lang="en-US" smtClean="0"/>
-              <a:t>6/17/2026</a:t>
+              <a:t>7/6/2026</a:t>
             </a:fld>
             <a:endParaRPr lang="en-US"/>
           </a:p>
@@ -687,7 +687,7 @@
           <a:p>
             <a:fld id="{6383FAE1-13DE-4511-8C1B-C8AFB720664C}" type="datetimeFigureOut">
               <a:rPr lang="en-US" smtClean="0"/>
-              <a:t>6/17/2026</a:t>
+              <a:t>7/6/2026</a:t>
             </a:fld>
             <a:endParaRPr lang="en-US"/>
           </a:p>
@@ -895,7 +895,7 @@
           <a:p>
             <a:fld id="{6383FAE1-13DE-4511-8C1B-C8AFB720664C}" type="datetimeFigureOut">
               <a:rPr lang="en-US" smtClean="0"/>
-              <a:t>6/17/2026</a:t>
+              <a:t>7/6/2026</a:t>
             </a:fld>
             <a:endParaRPr lang="en-US"/>
           </a:p>
@@ -1093,7 +1093,7 @@
           <a:p>
             <a:fld id="{6383FAE1-13DE-4511-8C1B-C8AFB720664C}" type="datetimeFigureOut">
               <a:rPr lang="en-US" smtClean="0"/>
-              <a:t>6/17/2026</a:t>
+              <a:t>7/6/2026</a:t>
             </a:fld>
             <a:endParaRPr lang="en-US"/>
           </a:p>
@@ -1368,7 +1368,7 @@
           <a:p>
             <a:fld id="{6383FAE1-13DE-4511-8C1B-C8AFB720664C}" type="datetimeFigureOut">
               <a:rPr lang="en-US" smtClean="0"/>
-              <a:t>6/17/2026</a:t>
+              <a:t>7/6/2026</a:t>
             </a:fld>
             <a:endParaRPr lang="en-US"/>
           </a:p>
@@ -1633,7 +1633,7 @@
           <a:p>
             <a:fld id="{6383FAE1-13DE-4511-8C1B-C8AFB720664C}" type="datetimeFigureOut">
               <a:rPr lang="en-US" smtClean="0"/>
-              <a:t>6/17/2026</a:t>
+              <a:t>7/6/2026</a:t>
             </a:fld>
             <a:endParaRPr lang="en-US"/>
           </a:p>
@@ -2045,7 +2045,7 @@
           <a:p>
             <a:fld id="{6383FAE1-13DE-4511-8C1B-C8AFB720664C}" type="datetimeFigureOut">
               <a:rPr lang="en-US" smtClean="0"/>
-              <a:t>6/17/2026</a:t>
+              <a:t>7/6/2026</a:t>
             </a:fld>
             <a:endParaRPr lang="en-US"/>
           </a:p>
@@ -2186,7 +2186,7 @@
           <a:p>
             <a:fld id="{6383FAE1-13DE-4511-8C1B-C8AFB720664C}" type="datetimeFigureOut">
               <a:rPr lang="en-US" smtClean="0"/>
-              <a:t>6/17/2026</a:t>
+              <a:t>7/6/2026</a:t>
             </a:fld>
             <a:endParaRPr lang="en-US"/>
           </a:p>
@@ -2299,7 +2299,7 @@
           <a:p>
             <a:fld id="{6383FAE1-13DE-4511-8C1B-C8AFB720664C}" type="datetimeFigureOut">
               <a:rPr lang="en-US" smtClean="0"/>
-              <a:t>6/17/2026</a:t>
+              <a:t>7/6/2026</a:t>
             </a:fld>
             <a:endParaRPr lang="en-US"/>
           </a:p>
@@ -2610,7 +2610,7 @@
           <a:p>
             <a:fld id="{6383FAE1-13DE-4511-8C1B-C8AFB720664C}" type="datetimeFigureOut">
               <a:rPr lang="en-US" smtClean="0"/>
-              <a:t>6/17/2026</a:t>
+              <a:t>7/6/2026</a:t>
             </a:fld>
             <a:endParaRPr lang="en-US"/>
           </a:p>
@@ -2901,7 +2901,7 @@
           <a:p>
             <a:fld id="{6383FAE1-13DE-4511-8C1B-C8AFB720664C}" type="datetimeFigureOut">
               <a:rPr lang="en-US" smtClean="0"/>
-              <a:t>6/17/2026</a:t>
+              <a:t>7/6/2026</a:t>
             </a:fld>
             <a:endParaRPr lang="en-US"/>
           </a:p>
@@ -3145,7 +3145,7 @@
           <a:p>
             <a:fld id="{6383FAE1-13DE-4511-8C1B-C8AFB720664C}" type="datetimeFigureOut">
               <a:rPr lang="en-US" smtClean="0"/>
-              <a:t>6/17/2026</a:t>
+              <a:t>7/6/2026</a:t>
             </a:fld>
             <a:endParaRPr lang="en-US"/>
           </a:p>
@@ -4785,7 +4785,7 @@
             <a:r>
               <a:rPr lang="en-US" sz="2000" dirty="0">
                 <a:solidFill>
-                  <a:schemeClr val="accent6">
+                  <a:schemeClr val="accent4">
                     <a:lumMod val="60000"/>
                     <a:lumOff val="40000"/>
                   </a:schemeClr>
@@ -4797,7 +4797,7 @@
           <a:p>
             <a:endParaRPr lang="en-US" sz="2000" dirty="0">
               <a:solidFill>
-                <a:schemeClr val="accent6">
+                <a:schemeClr val="accent4">
                   <a:lumMod val="60000"/>
                   <a:lumOff val="40000"/>
                 </a:schemeClr>
@@ -4808,7 +4808,7 @@
             <a:r>
               <a:rPr lang="en-US" sz="2000" dirty="0">
                 <a:solidFill>
-                  <a:schemeClr val="accent6">
+                  <a:schemeClr val="accent4">
                     <a:lumMod val="60000"/>
                     <a:lumOff val="40000"/>
                   </a:schemeClr>
@@ -4819,7 +4819,7 @@
             <a:r>
               <a:rPr lang="en-US" sz="2000" dirty="0" err="1">
                 <a:solidFill>
-                  <a:schemeClr val="accent6">
+                  <a:schemeClr val="accent4">
                     <a:lumMod val="60000"/>
                     <a:lumOff val="40000"/>
                   </a:schemeClr>
@@ -4830,7 +4830,7 @@
             <a:r>
               <a:rPr lang="en-US" sz="2000" dirty="0">
                 <a:solidFill>
-                  <a:schemeClr val="accent6">
+                  <a:schemeClr val="accent4">
                     <a:lumMod val="60000"/>
                     <a:lumOff val="40000"/>
                   </a:schemeClr>
@@ -4843,7 +4843,7 @@
             <a:r>
               <a:rPr lang="en-US" sz="2000" dirty="0">
                 <a:solidFill>
-                  <a:schemeClr val="accent6">
+                  <a:schemeClr val="accent4">
                     <a:lumMod val="60000"/>
                     <a:lumOff val="40000"/>
                   </a:schemeClr>
@@ -4854,7 +4854,7 @@
             <a:r>
               <a:rPr lang="en-US" sz="2000" dirty="0" err="1">
                 <a:solidFill>
-                  <a:schemeClr val="accent6">
+                  <a:schemeClr val="accent4">
                     <a:lumMod val="60000"/>
                     <a:lumOff val="40000"/>
                   </a:schemeClr>
@@ -4865,7 +4865,7 @@
             <a:r>
               <a:rPr lang="en-US" sz="2000" dirty="0">
                 <a:solidFill>
-                  <a:schemeClr val="accent6">
+                  <a:schemeClr val="accent4">
                     <a:lumMod val="60000"/>
                     <a:lumOff val="40000"/>
                   </a:schemeClr>
@@ -4878,7 +4878,7 @@
             <a:r>
               <a:rPr lang="en-US" sz="2000" dirty="0">
                 <a:solidFill>
-                  <a:schemeClr val="accent6">
+                  <a:schemeClr val="accent4">
                     <a:lumMod val="60000"/>
                     <a:lumOff val="40000"/>
                   </a:schemeClr>
@@ -4889,7 +4889,7 @@
             <a:r>
               <a:rPr lang="en-US" sz="2000" dirty="0" err="1">
                 <a:solidFill>
-                  <a:schemeClr val="accent6">
+                  <a:schemeClr val="accent4">
                     <a:lumMod val="60000"/>
                     <a:lumOff val="40000"/>
                   </a:schemeClr>
@@ -4900,7 +4900,7 @@
             <a:r>
               <a:rPr lang="en-US" sz="2000" dirty="0">
                 <a:solidFill>
-                  <a:schemeClr val="accent6">
+                  <a:schemeClr val="accent4">
                     <a:lumMod val="60000"/>
                     <a:lumOff val="40000"/>
                   </a:schemeClr>
@@ -4913,7 +4913,7 @@
             <a:r>
               <a:rPr lang="en-US" sz="2000" dirty="0">
                 <a:solidFill>
-                  <a:schemeClr val="accent6">
+                  <a:schemeClr val="accent4">
                     <a:lumMod val="60000"/>
                     <a:lumOff val="40000"/>
                   </a:schemeClr>
@@ -4926,7 +4926,7 @@
             <a:r>
               <a:rPr lang="en-US" sz="2000" dirty="0">
                 <a:solidFill>
-                  <a:schemeClr val="accent6">
+                  <a:schemeClr val="accent4">
                     <a:lumMod val="60000"/>
                     <a:lumOff val="40000"/>
                   </a:schemeClr>
@@ -4937,7 +4937,7 @@
             <a:r>
               <a:rPr lang="en-US" sz="2000" dirty="0" err="1">
                 <a:solidFill>
-                  <a:schemeClr val="accent6">
+                  <a:schemeClr val="accent4">
                     <a:lumMod val="60000"/>
                     <a:lumOff val="40000"/>
                   </a:schemeClr>
@@ -4948,7 +4948,7 @@
             <a:r>
               <a:rPr lang="en-US" sz="2000" dirty="0">
                 <a:solidFill>
-                  <a:schemeClr val="accent6">
+                  <a:schemeClr val="accent4">
                     <a:lumMod val="60000"/>
                     <a:lumOff val="40000"/>
                   </a:schemeClr>
@@ -4961,7 +4961,7 @@
             <a:r>
               <a:rPr lang="en-US" sz="2000" dirty="0">
                 <a:solidFill>
-                  <a:schemeClr val="accent6">
+                  <a:schemeClr val="accent4">
                     <a:lumMod val="60000"/>
                     <a:lumOff val="40000"/>
                   </a:schemeClr>
@@ -4972,7 +4972,7 @@
             <a:r>
               <a:rPr lang="en-US" sz="2000" dirty="0" err="1">
                 <a:solidFill>
-                  <a:schemeClr val="accent6">
+                  <a:schemeClr val="accent4">
                     <a:lumMod val="60000"/>
                     <a:lumOff val="40000"/>
                   </a:schemeClr>
@@ -4983,7 +4983,7 @@
             <a:r>
               <a:rPr lang="en-US" sz="2000" dirty="0">
                 <a:solidFill>
-                  <a:schemeClr val="accent6">
+                  <a:schemeClr val="accent4">
                     <a:lumMod val="60000"/>
                     <a:lumOff val="40000"/>
                   </a:schemeClr>
@@ -4996,7 +4996,7 @@
             <a:r>
               <a:rPr lang="en-US" sz="2000" dirty="0">
                 <a:solidFill>
-                  <a:schemeClr val="accent6">
+                  <a:schemeClr val="accent4">
                     <a:lumMod val="60000"/>
                     <a:lumOff val="40000"/>
                   </a:schemeClr>
@@ -5423,7 +5423,7 @@
             <a:r>
               <a:rPr lang="en-US" dirty="0">
                 <a:solidFill>
-                  <a:schemeClr val="accent6">
+                  <a:schemeClr val="accent4">
                     <a:lumMod val="60000"/>
                     <a:lumOff val="40000"/>
                   </a:schemeClr>
@@ -5434,7 +5434,7 @@
             <a:r>
               <a:rPr lang="en-US" dirty="0" err="1">
                 <a:solidFill>
-                  <a:schemeClr val="accent6">
+                  <a:schemeClr val="accent4">
                     <a:lumMod val="60000"/>
                     <a:lumOff val="40000"/>
                   </a:schemeClr>
@@ -5445,7 +5445,7 @@
             <a:r>
               <a:rPr lang="en-US" dirty="0">
                 <a:solidFill>
-                  <a:schemeClr val="accent6">
+                  <a:schemeClr val="accent4">
                     <a:lumMod val="60000"/>
                     <a:lumOff val="40000"/>
                   </a:schemeClr>
@@ -5458,7 +5458,7 @@
             <a:r>
               <a:rPr lang="en-US" dirty="0">
                 <a:solidFill>
-                  <a:schemeClr val="accent6">
+                  <a:schemeClr val="accent4">
                     <a:lumMod val="60000"/>
                     <a:lumOff val="40000"/>
                   </a:schemeClr>
@@ -5470,7 +5470,7 @@
           <a:p>
             <a:endParaRPr lang="en-US" dirty="0">
               <a:solidFill>
-                <a:schemeClr val="accent6">
+                <a:schemeClr val="accent4">
                   <a:lumMod val="60000"/>
                   <a:lumOff val="40000"/>
                 </a:schemeClr>
@@ -5481,7 +5481,7 @@
             <a:r>
               <a:rPr lang="en-US" dirty="0">
                 <a:solidFill>
-                  <a:schemeClr val="accent6">
+                  <a:schemeClr val="accent4">
                     <a:lumMod val="60000"/>
                     <a:lumOff val="40000"/>
                   </a:schemeClr>
@@ -5492,7 +5492,7 @@
             <a:r>
               <a:rPr lang="en-US" dirty="0" err="1">
                 <a:solidFill>
-                  <a:schemeClr val="accent6">
+                  <a:schemeClr val="accent4">
                     <a:lumMod val="60000"/>
                     <a:lumOff val="40000"/>
                   </a:schemeClr>
@@ -5503,7 +5503,7 @@
             <a:r>
               <a:rPr lang="en-US" dirty="0">
                 <a:solidFill>
-                  <a:schemeClr val="accent6">
+                  <a:schemeClr val="accent4">
                     <a:lumMod val="60000"/>
                     <a:lumOff val="40000"/>
                   </a:schemeClr>
@@ -5516,7 +5516,7 @@
             <a:r>
               <a:rPr lang="en-US" dirty="0">
                 <a:solidFill>
-                  <a:schemeClr val="accent6">
+                  <a:schemeClr val="accent4">
                     <a:lumMod val="60000"/>
                     <a:lumOff val="40000"/>
                   </a:schemeClr>
@@ -5527,7 +5527,7 @@
             <a:r>
               <a:rPr lang="en-US" dirty="0" err="1">
                 <a:solidFill>
-                  <a:schemeClr val="accent6">
+                  <a:schemeClr val="accent4">
                     <a:lumMod val="60000"/>
                     <a:lumOff val="40000"/>
                   </a:schemeClr>
@@ -5538,7 +5538,7 @@
             <a:r>
               <a:rPr lang="en-US" dirty="0">
                 <a:solidFill>
-                  <a:schemeClr val="accent6">
+                  <a:schemeClr val="accent4">
                     <a:lumMod val="60000"/>
                     <a:lumOff val="40000"/>
                   </a:schemeClr>
@@ -5551,7 +5551,7 @@
             <a:r>
               <a:rPr lang="en-US" dirty="0">
                 <a:solidFill>
-                  <a:schemeClr val="accent6">
+                  <a:schemeClr val="accent4">
                     <a:lumMod val="60000"/>
                     <a:lumOff val="40000"/>
                   </a:schemeClr>
@@ -5564,7 +5564,7 @@
             <a:r>
               <a:rPr lang="en-US" dirty="0">
                 <a:solidFill>
-                  <a:schemeClr val="accent6">
+                  <a:schemeClr val="accent4">
                     <a:lumMod val="60000"/>
                     <a:lumOff val="40000"/>
                   </a:schemeClr>
@@ -5575,7 +5575,7 @@
             <a:r>
               <a:rPr lang="en-US" dirty="0" err="1">
                 <a:solidFill>
-                  <a:schemeClr val="accent6">
+                  <a:schemeClr val="accent4">
                     <a:lumMod val="60000"/>
                     <a:lumOff val="40000"/>
                   </a:schemeClr>
@@ -5586,7 +5586,7 @@
             <a:r>
               <a:rPr lang="en-US" dirty="0">
                 <a:solidFill>
-                  <a:schemeClr val="accent6">
+                  <a:schemeClr val="accent4">
                     <a:lumMod val="60000"/>
                     <a:lumOff val="40000"/>
                   </a:schemeClr>
@@ -5597,7 +5597,7 @@
             <a:r>
               <a:rPr lang="en-US" dirty="0" err="1">
                 <a:solidFill>
-                  <a:schemeClr val="accent6">
+                  <a:schemeClr val="accent4">
                     <a:lumMod val="60000"/>
                     <a:lumOff val="40000"/>
                   </a:schemeClr>
@@ -5608,7 +5608,7 @@
             <a:r>
               <a:rPr lang="en-US" dirty="0">
                 <a:solidFill>
-                  <a:schemeClr val="accent6">
+                  <a:schemeClr val="accent4">
                     <a:lumMod val="60000"/>
                     <a:lumOff val="40000"/>
                   </a:schemeClr>
@@ -5621,7 +5621,7 @@
             <a:r>
               <a:rPr lang="en-US" dirty="0">
                 <a:solidFill>
-                  <a:schemeClr val="accent6">
+                  <a:schemeClr val="accent4">
                     <a:lumMod val="60000"/>
                     <a:lumOff val="40000"/>
                   </a:schemeClr>
@@ -5632,7 +5632,7 @@
             <a:r>
               <a:rPr lang="en-US" dirty="0" err="1">
                 <a:solidFill>
-                  <a:schemeClr val="accent6">
+                  <a:schemeClr val="accent4">
                     <a:lumMod val="60000"/>
                     <a:lumOff val="40000"/>
                   </a:schemeClr>
@@ -5643,7 +5643,7 @@
             <a:r>
               <a:rPr lang="en-US" dirty="0">
                 <a:solidFill>
-                  <a:schemeClr val="accent6">
+                  <a:schemeClr val="accent4">
                     <a:lumMod val="60000"/>
                     <a:lumOff val="40000"/>
                   </a:schemeClr>
@@ -5656,7 +5656,7 @@
             <a:r>
               <a:rPr lang="en-US" dirty="0">
                 <a:solidFill>
-                  <a:schemeClr val="accent6">
+                  <a:schemeClr val="accent4">
                     <a:lumMod val="60000"/>
                     <a:lumOff val="40000"/>
                   </a:schemeClr>
@@ -5669,7 +5669,7 @@
             <a:r>
               <a:rPr lang="en-US" dirty="0">
                 <a:solidFill>
-                  <a:schemeClr val="accent6">
+                  <a:schemeClr val="accent4">
                     <a:lumMod val="60000"/>
                     <a:lumOff val="40000"/>
                   </a:schemeClr>
@@ -5680,7 +5680,7 @@
             <a:r>
               <a:rPr lang="en-US" dirty="0" err="1">
                 <a:solidFill>
-                  <a:schemeClr val="accent6">
+                  <a:schemeClr val="accent4">
                     <a:lumMod val="60000"/>
                     <a:lumOff val="40000"/>
                   </a:schemeClr>
@@ -5691,7 +5691,7 @@
             <a:r>
               <a:rPr lang="en-US" dirty="0">
                 <a:solidFill>
-                  <a:schemeClr val="accent6">
+                  <a:schemeClr val="accent4">
                     <a:lumMod val="60000"/>
                     <a:lumOff val="40000"/>
                   </a:schemeClr>
@@ -5702,7 +5702,7 @@
             <a:r>
               <a:rPr lang="en-US" dirty="0" err="1">
                 <a:solidFill>
-                  <a:schemeClr val="accent6">
+                  <a:schemeClr val="accent4">
                     <a:lumMod val="60000"/>
                     <a:lumOff val="40000"/>
                   </a:schemeClr>
@@ -5713,7 +5713,7 @@
             <a:r>
               <a:rPr lang="en-US" dirty="0">
                 <a:solidFill>
-                  <a:schemeClr val="accent6">
+                  <a:schemeClr val="accent4">
                     <a:lumMod val="60000"/>
                     <a:lumOff val="40000"/>
                   </a:schemeClr>
@@ -5724,7 +5724,7 @@
             <a:r>
               <a:rPr lang="en-US" dirty="0" err="1">
                 <a:solidFill>
-                  <a:schemeClr val="accent6">
+                  <a:schemeClr val="accent4">
                     <a:lumMod val="60000"/>
                     <a:lumOff val="40000"/>
                   </a:schemeClr>
@@ -5735,7 +5735,7 @@
             <a:r>
               <a:rPr lang="en-US" dirty="0">
                 <a:solidFill>
-                  <a:schemeClr val="accent6">
+                  <a:schemeClr val="accent4">
                     <a:lumMod val="60000"/>
                     <a:lumOff val="40000"/>
                   </a:schemeClr>
@@ -5748,7 +5748,7 @@
             <a:r>
               <a:rPr lang="en-US" dirty="0">
                 <a:solidFill>
-                  <a:schemeClr val="accent6">
+                  <a:schemeClr val="accent4">
                     <a:lumMod val="60000"/>
                     <a:lumOff val="40000"/>
                   </a:schemeClr>
@@ -5761,7 +5761,7 @@
             <a:r>
               <a:rPr lang="en-US" dirty="0">
                 <a:solidFill>
-                  <a:schemeClr val="accent6">
+                  <a:schemeClr val="accent4">
                     <a:lumMod val="60000"/>
                     <a:lumOff val="40000"/>
                   </a:schemeClr>
@@ -5772,7 +5772,7 @@
             <a:r>
               <a:rPr lang="en-US" dirty="0" err="1">
                 <a:solidFill>
-                  <a:schemeClr val="accent6">
+                  <a:schemeClr val="accent4">
                     <a:lumMod val="60000"/>
                     <a:lumOff val="40000"/>
                   </a:schemeClr>
@@ -5783,7 +5783,7 @@
             <a:r>
               <a:rPr lang="en-US" dirty="0">
                 <a:solidFill>
-                  <a:schemeClr val="accent6">
+                  <a:schemeClr val="accent4">
                     <a:lumMod val="60000"/>
                     <a:lumOff val="40000"/>
                   </a:schemeClr>
@@ -5796,7 +5796,7 @@
             <a:r>
               <a:rPr lang="en-US" dirty="0">
                 <a:solidFill>
-                  <a:schemeClr val="accent6">
+                  <a:schemeClr val="accent4">
                     <a:lumMod val="60000"/>
                     <a:lumOff val="40000"/>
                   </a:schemeClr>
@@ -5809,7 +5809,7 @@
             <a:r>
               <a:rPr lang="en-US" dirty="0">
                 <a:solidFill>
-                  <a:schemeClr val="accent6">
+                  <a:schemeClr val="accent4">
                     <a:lumMod val="60000"/>
                     <a:lumOff val="40000"/>
                   </a:schemeClr>
@@ -5820,7 +5820,7 @@
             <a:r>
               <a:rPr lang="en-US" dirty="0" err="1">
                 <a:solidFill>
-                  <a:schemeClr val="accent6">
+                  <a:schemeClr val="accent4">
                     <a:lumMod val="60000"/>
                     <a:lumOff val="40000"/>
                   </a:schemeClr>
@@ -5831,7 +5831,7 @@
             <a:r>
               <a:rPr lang="en-US" dirty="0">
                 <a:solidFill>
-                  <a:schemeClr val="accent6">
+                  <a:schemeClr val="accent4">
                     <a:lumMod val="60000"/>
                     <a:lumOff val="40000"/>
                   </a:schemeClr>
@@ -5844,7 +5844,7 @@
             <a:r>
               <a:rPr lang="en-US" dirty="0">
                 <a:solidFill>
-                  <a:schemeClr val="accent6">
+                  <a:schemeClr val="accent4">
                     <a:lumMod val="60000"/>
                     <a:lumOff val="40000"/>
                   </a:schemeClr>
@@ -5857,7 +5857,7 @@
             <a:r>
               <a:rPr lang="en-US" dirty="0">
                 <a:solidFill>
-                  <a:schemeClr val="accent6">
+                  <a:schemeClr val="accent4">
                     <a:lumMod val="60000"/>
                     <a:lumOff val="40000"/>
                   </a:schemeClr>
@@ -6133,8 +6133,8 @@
         </p:nvSpPr>
         <p:spPr>
           <a:xfrm>
-            <a:off x="381000" y="436760"/>
-            <a:ext cx="11430000" cy="2569934"/>
+            <a:off x="527304" y="171584"/>
+            <a:ext cx="11430000" cy="6404317"/>
           </a:xfrm>
           <a:prstGeom prst="rect">
             <a:avLst/>
@@ -6153,24 +6153,6 @@
               </a:spcAft>
               <a:buNone/>
             </a:pPr>
-            <a:endParaRPr lang="en-US" b="0" i="0" dirty="0">
-              <a:solidFill>
-                <a:schemeClr val="accent6">
-                  <a:lumMod val="60000"/>
-                  <a:lumOff val="40000"/>
-                </a:schemeClr>
-              </a:solidFill>
-              <a:effectLst/>
-              <a:latin typeface="Anthropic Sans"/>
-            </a:endParaRPr>
-          </a:p>
-          <a:p>
-            <a:pPr algn="l">
-              <a:spcAft>
-                <a:spcPts val="450"/>
-              </a:spcAft>
-              <a:buNone/>
-            </a:pPr>
             <a:r>
               <a:rPr lang="en-US" b="0" i="0" dirty="0">
                 <a:solidFill>
@@ -6203,7 +6185,32 @@
                 <a:effectLst/>
                 <a:latin typeface="ui-monospace"/>
               </a:rPr>
-              <a:t>This JavaScript function is supposed to return unique values from an array but it's returning duplicates. </a:t>
+              <a:t>This </a:t>
+            </a:r>
+            <a:r>
+              <a:rPr lang="en-US" dirty="0">
+                <a:solidFill>
+                  <a:schemeClr val="accent6">
+                    <a:lumMod val="60000"/>
+                    <a:lumOff val="40000"/>
+                  </a:schemeClr>
+                </a:solidFill>
+                <a:latin typeface="ui-monospace"/>
+              </a:rPr>
+              <a:t>python </a:t>
+            </a:r>
+            <a:r>
+              <a:rPr lang="en-US" b="0" i="0" dirty="0">
+                <a:solidFill>
+                  <a:schemeClr val="accent6">
+                    <a:lumMod val="60000"/>
+                    <a:lumOff val="40000"/>
+                  </a:schemeClr>
+                </a:solidFill>
+                <a:effectLst/>
+                <a:latin typeface="ui-monospace"/>
+              </a:rPr>
+              <a:t>function is supposed to return unique values from an array but it's returning duplicates. </a:t>
             </a:r>
           </a:p>
           <a:p>
@@ -6224,7 +6231,426 @@
                 <a:effectLst/>
                 <a:latin typeface="ui-monospace"/>
               </a:rPr>
-              <a:t>Here's the code: [paste code]. </a:t>
+              <a:t>Here's the code:</a:t>
+            </a:r>
+          </a:p>
+          <a:p>
+            <a:pPr>
+              <a:spcAft>
+                <a:spcPts val="750"/>
+              </a:spcAft>
+            </a:pPr>
+            <a:r>
+              <a:rPr lang="en-US" dirty="0">
+                <a:solidFill>
+                  <a:schemeClr val="accent4">
+                    <a:lumMod val="60000"/>
+                    <a:lumOff val="40000"/>
+                  </a:schemeClr>
+                </a:solidFill>
+                <a:latin typeface="ui-monospace"/>
+              </a:rPr>
+              <a:t>def </a:t>
+            </a:r>
+            <a:r>
+              <a:rPr lang="en-US" dirty="0" err="1">
+                <a:solidFill>
+                  <a:schemeClr val="accent4">
+                    <a:lumMod val="60000"/>
+                    <a:lumOff val="40000"/>
+                  </a:schemeClr>
+                </a:solidFill>
+                <a:latin typeface="ui-monospace"/>
+              </a:rPr>
+              <a:t>get_unique_values</a:t>
+            </a:r>
+            <a:r>
+              <a:rPr lang="en-US" dirty="0">
+                <a:solidFill>
+                  <a:schemeClr val="accent4">
+                    <a:lumMod val="60000"/>
+                    <a:lumOff val="40000"/>
+                  </a:schemeClr>
+                </a:solidFill>
+                <a:latin typeface="ui-monospace"/>
+              </a:rPr>
+              <a:t>(</a:t>
+            </a:r>
+            <a:r>
+              <a:rPr lang="en-US" dirty="0" err="1">
+                <a:solidFill>
+                  <a:schemeClr val="accent4">
+                    <a:lumMod val="60000"/>
+                    <a:lumOff val="40000"/>
+                  </a:schemeClr>
+                </a:solidFill>
+                <a:latin typeface="ui-monospace"/>
+              </a:rPr>
+              <a:t>lst</a:t>
+            </a:r>
+            <a:r>
+              <a:rPr lang="en-US" dirty="0">
+                <a:solidFill>
+                  <a:schemeClr val="accent4">
+                    <a:lumMod val="60000"/>
+                    <a:lumOff val="40000"/>
+                  </a:schemeClr>
+                </a:solidFill>
+                <a:latin typeface="ui-monospace"/>
+              </a:rPr>
+              <a:t>):</a:t>
+            </a:r>
+          </a:p>
+          <a:p>
+            <a:pPr>
+              <a:spcAft>
+                <a:spcPts val="750"/>
+              </a:spcAft>
+            </a:pPr>
+            <a:r>
+              <a:rPr lang="en-US" dirty="0">
+                <a:solidFill>
+                  <a:schemeClr val="accent4">
+                    <a:lumMod val="60000"/>
+                    <a:lumOff val="40000"/>
+                  </a:schemeClr>
+                </a:solidFill>
+                <a:latin typeface="ui-monospace"/>
+              </a:rPr>
+              <a:t>    </a:t>
+            </a:r>
+            <a:r>
+              <a:rPr lang="en-US" dirty="0" err="1">
+                <a:solidFill>
+                  <a:schemeClr val="accent4">
+                    <a:lumMod val="60000"/>
+                    <a:lumOff val="40000"/>
+                  </a:schemeClr>
+                </a:solidFill>
+                <a:latin typeface="ui-monospace"/>
+              </a:rPr>
+              <a:t>unique_elements</a:t>
+            </a:r>
+            <a:r>
+              <a:rPr lang="en-US" dirty="0">
+                <a:solidFill>
+                  <a:schemeClr val="accent4">
+                    <a:lumMod val="60000"/>
+                    <a:lumOff val="40000"/>
+                  </a:schemeClr>
+                </a:solidFill>
+                <a:latin typeface="ui-monospace"/>
+              </a:rPr>
+              <a:t> = []</a:t>
+            </a:r>
+          </a:p>
+          <a:p>
+            <a:pPr>
+              <a:spcAft>
+                <a:spcPts val="750"/>
+              </a:spcAft>
+            </a:pPr>
+            <a:r>
+              <a:rPr lang="en-US" dirty="0">
+                <a:solidFill>
+                  <a:schemeClr val="accent4">
+                    <a:lumMod val="60000"/>
+                    <a:lumOff val="40000"/>
+                  </a:schemeClr>
+                </a:solidFill>
+                <a:latin typeface="ui-monospace"/>
+              </a:rPr>
+              <a:t>    for item in </a:t>
+            </a:r>
+            <a:r>
+              <a:rPr lang="en-US" dirty="0" err="1">
+                <a:solidFill>
+                  <a:schemeClr val="accent4">
+                    <a:lumMod val="60000"/>
+                    <a:lumOff val="40000"/>
+                  </a:schemeClr>
+                </a:solidFill>
+                <a:latin typeface="ui-monospace"/>
+              </a:rPr>
+              <a:t>lst</a:t>
+            </a:r>
+            <a:r>
+              <a:rPr lang="en-US" dirty="0">
+                <a:solidFill>
+                  <a:schemeClr val="accent4">
+                    <a:lumMod val="60000"/>
+                    <a:lumOff val="40000"/>
+                  </a:schemeClr>
+                </a:solidFill>
+                <a:latin typeface="ui-monospace"/>
+              </a:rPr>
+              <a:t>:</a:t>
+            </a:r>
+          </a:p>
+          <a:p>
+            <a:pPr>
+              <a:spcAft>
+                <a:spcPts val="750"/>
+              </a:spcAft>
+            </a:pPr>
+            <a:r>
+              <a:rPr lang="en-US" dirty="0">
+                <a:solidFill>
+                  <a:schemeClr val="accent4">
+                    <a:lumMod val="60000"/>
+                    <a:lumOff val="40000"/>
+                  </a:schemeClr>
+                </a:solidFill>
+                <a:latin typeface="ui-monospace"/>
+              </a:rPr>
+              <a:t>        if item not in </a:t>
+            </a:r>
+            <a:r>
+              <a:rPr lang="en-US" dirty="0" err="1">
+                <a:solidFill>
+                  <a:schemeClr val="accent4">
+                    <a:lumMod val="60000"/>
+                    <a:lumOff val="40000"/>
+                  </a:schemeClr>
+                </a:solidFill>
+                <a:latin typeface="ui-monospace"/>
+              </a:rPr>
+              <a:t>unique_elements</a:t>
+            </a:r>
+            <a:r>
+              <a:rPr lang="en-US" dirty="0">
+                <a:solidFill>
+                  <a:schemeClr val="accent4">
+                    <a:lumMod val="60000"/>
+                    <a:lumOff val="40000"/>
+                  </a:schemeClr>
+                </a:solidFill>
+                <a:latin typeface="ui-monospace"/>
+              </a:rPr>
+              <a:t>:</a:t>
+            </a:r>
+          </a:p>
+          <a:p>
+            <a:pPr>
+              <a:spcAft>
+                <a:spcPts val="750"/>
+              </a:spcAft>
+            </a:pPr>
+            <a:r>
+              <a:rPr lang="en-US" dirty="0">
+                <a:solidFill>
+                  <a:schemeClr val="accent4">
+                    <a:lumMod val="60000"/>
+                    <a:lumOff val="40000"/>
+                  </a:schemeClr>
+                </a:solidFill>
+                <a:latin typeface="ui-monospace"/>
+              </a:rPr>
+              <a:t>            </a:t>
+            </a:r>
+            <a:r>
+              <a:rPr lang="en-US" dirty="0" err="1">
+                <a:solidFill>
+                  <a:schemeClr val="accent4">
+                    <a:lumMod val="60000"/>
+                    <a:lumOff val="40000"/>
+                  </a:schemeClr>
+                </a:solidFill>
+                <a:latin typeface="ui-monospace"/>
+              </a:rPr>
+              <a:t>unique_elements.append</a:t>
+            </a:r>
+            <a:r>
+              <a:rPr lang="en-US" dirty="0">
+                <a:solidFill>
+                  <a:schemeClr val="accent4">
+                    <a:lumMod val="60000"/>
+                    <a:lumOff val="40000"/>
+                  </a:schemeClr>
+                </a:solidFill>
+                <a:latin typeface="ui-monospace"/>
+              </a:rPr>
+              <a:t>(item)</a:t>
+            </a:r>
+          </a:p>
+          <a:p>
+            <a:pPr>
+              <a:spcAft>
+                <a:spcPts val="750"/>
+              </a:spcAft>
+            </a:pPr>
+            <a:r>
+              <a:rPr lang="en-US" dirty="0">
+                <a:solidFill>
+                  <a:schemeClr val="accent4">
+                    <a:lumMod val="60000"/>
+                    <a:lumOff val="40000"/>
+                  </a:schemeClr>
+                </a:solidFill>
+                <a:latin typeface="ui-monospace"/>
+              </a:rPr>
+              <a:t>            </a:t>
+            </a:r>
+          </a:p>
+          <a:p>
+            <a:pPr>
+              <a:spcAft>
+                <a:spcPts val="750"/>
+              </a:spcAft>
+            </a:pPr>
+            <a:r>
+              <a:rPr lang="en-US" dirty="0">
+                <a:solidFill>
+                  <a:schemeClr val="accent4">
+                    <a:lumMod val="60000"/>
+                    <a:lumOff val="40000"/>
+                  </a:schemeClr>
+                </a:solidFill>
+                <a:latin typeface="ui-monospace"/>
+              </a:rPr>
+              <a:t>    return </a:t>
+            </a:r>
+            <a:r>
+              <a:rPr lang="en-US" dirty="0" err="1">
+                <a:solidFill>
+                  <a:schemeClr val="accent4">
+                    <a:lumMod val="60000"/>
+                    <a:lumOff val="40000"/>
+                  </a:schemeClr>
+                </a:solidFill>
+                <a:latin typeface="ui-monospace"/>
+              </a:rPr>
+              <a:t>unique_elements</a:t>
+            </a:r>
+            <a:endParaRPr lang="en-US" dirty="0">
+              <a:solidFill>
+                <a:schemeClr val="accent4">
+                  <a:lumMod val="60000"/>
+                  <a:lumOff val="40000"/>
+                </a:schemeClr>
+              </a:solidFill>
+              <a:latin typeface="ui-monospace"/>
+            </a:endParaRPr>
+          </a:p>
+          <a:p>
+            <a:pPr>
+              <a:spcAft>
+                <a:spcPts val="750"/>
+              </a:spcAft>
+            </a:pPr>
+            <a:endParaRPr lang="en-US" dirty="0">
+              <a:solidFill>
+                <a:schemeClr val="accent4">
+                  <a:lumMod val="60000"/>
+                  <a:lumOff val="40000"/>
+                </a:schemeClr>
+              </a:solidFill>
+              <a:latin typeface="ui-monospace"/>
+            </a:endParaRPr>
+          </a:p>
+          <a:p>
+            <a:pPr>
+              <a:spcAft>
+                <a:spcPts val="750"/>
+              </a:spcAft>
+            </a:pPr>
+            <a:r>
+              <a:rPr lang="en-US" dirty="0">
+                <a:solidFill>
+                  <a:schemeClr val="accent4">
+                    <a:lumMod val="60000"/>
+                    <a:lumOff val="40000"/>
+                  </a:schemeClr>
+                </a:solidFill>
+                <a:latin typeface="ui-monospace"/>
+              </a:rPr>
+              <a:t># Test case with </a:t>
+            </a:r>
+            <a:r>
+              <a:rPr lang="en-US" dirty="0" err="1">
+                <a:solidFill>
+                  <a:schemeClr val="accent4">
+                    <a:lumMod val="60000"/>
+                    <a:lumOff val="40000"/>
+                  </a:schemeClr>
+                </a:solidFill>
+                <a:latin typeface="ui-monospace"/>
+              </a:rPr>
+              <a:t>unhashable</a:t>
+            </a:r>
+            <a:r>
+              <a:rPr lang="en-US" dirty="0">
+                <a:solidFill>
+                  <a:schemeClr val="accent4">
+                    <a:lumMod val="60000"/>
+                    <a:lumOff val="40000"/>
+                  </a:schemeClr>
+                </a:solidFill>
+                <a:latin typeface="ui-monospace"/>
+              </a:rPr>
+              <a:t> dictionaries</a:t>
+            </a:r>
+          </a:p>
+          <a:p>
+            <a:pPr>
+              <a:spcAft>
+                <a:spcPts val="750"/>
+              </a:spcAft>
+            </a:pPr>
+            <a:r>
+              <a:rPr lang="en-US" dirty="0">
+                <a:solidFill>
+                  <a:schemeClr val="accent4">
+                    <a:lumMod val="60000"/>
+                    <a:lumOff val="40000"/>
+                  </a:schemeClr>
+                </a:solidFill>
+                <a:latin typeface="ui-monospace"/>
+              </a:rPr>
+              <a:t>data = [{"id": 1}, {"id": 2}, {"id": 1}]</a:t>
+            </a:r>
+          </a:p>
+          <a:p>
+            <a:pPr>
+              <a:spcAft>
+                <a:spcPts val="750"/>
+              </a:spcAft>
+            </a:pPr>
+            <a:r>
+              <a:rPr lang="en-US" dirty="0">
+                <a:solidFill>
+                  <a:schemeClr val="accent4">
+                    <a:lumMod val="60000"/>
+                    <a:lumOff val="40000"/>
+                  </a:schemeClr>
+                </a:solidFill>
+                <a:latin typeface="ui-monospace"/>
+              </a:rPr>
+              <a:t>print(</a:t>
+            </a:r>
+            <a:r>
+              <a:rPr lang="en-US" dirty="0" err="1">
+                <a:solidFill>
+                  <a:schemeClr val="accent4">
+                    <a:lumMod val="60000"/>
+                    <a:lumOff val="40000"/>
+                  </a:schemeClr>
+                </a:solidFill>
+                <a:latin typeface="ui-monospace"/>
+              </a:rPr>
+              <a:t>get_unique_values</a:t>
+            </a:r>
+            <a:r>
+              <a:rPr lang="en-US" dirty="0">
+                <a:solidFill>
+                  <a:schemeClr val="accent4">
+                    <a:lumMod val="60000"/>
+                    <a:lumOff val="40000"/>
+                  </a:schemeClr>
+                </a:solidFill>
+                <a:latin typeface="ui-monospace"/>
+              </a:rPr>
+              <a:t>(data))</a:t>
             </a:r>
           </a:p>
           <a:p>
